--- a/test-corpus/word-verification/eventmodeling.pptx
+++ b/test-corpus/word-verification/eventmodeling.pptx
@@ -144,8 +144,8 @@
         </p:nvSpPr>
         <p:spPr>
           <a:xfrm>
-            <a:off x="457200" y="2688653"/>
-            <a:ext cx="11277600" cy="366238"/>
+            <a:off x="457200" y="3074687"/>
+            <a:ext cx="7034784" cy="228453"/>
           </a:xfrm>
           <a:prstGeom prst="rect">
             <a:avLst/>
@@ -168,19 +168,19 @@
         </p:nvSpPr>
         <p:spPr>
           <a:xfrm>
-            <a:off x="495087" y="2783370"/>
-            <a:ext cx="681960" cy="88402"/>
-          </a:xfrm>
-          <a:prstGeom prst="rect">
-            <a:avLst/>
-          </a:prstGeom>
-          <a:noFill/>
-          <a:ln>
-            <a:noFill/>
-          </a:ln>
-        </p:spPr>
-        <p:txBody>
-          <a:bodyPr wrap="none" lIns="12629" tIns="0" rIns="12629" bIns="0" anchor="ctr"/>
+            <a:off x="480833" y="3133770"/>
+            <a:ext cx="425396" cy="55144"/>
+          </a:xfrm>
+          <a:prstGeom prst="rect">
+            <a:avLst/>
+          </a:prstGeom>
+          <a:noFill/>
+          <a:ln>
+            <a:noFill/>
+          </a:ln>
+        </p:spPr>
+        <p:txBody>
+          <a:bodyPr wrap="none" lIns="7878" tIns="0" rIns="7878" bIns="0" anchor="ctr"/>
           <a:lstStyle/>
           <a:p>
             <a:pPr algn="l">
@@ -192,7 +192,7 @@
               </a:spcAft>
             </a:pPr>
             <a:r>
-              <a:rPr lang="en-US" b="1" sz="550" dirty="0">
+              <a:rPr lang="en-US" b="1" sz="350" dirty="0">
                 <a:solidFill>
                   <a:srgbClr val="333333"/>
                 </a:solidFill>
@@ -210,8 +210,8 @@
         </p:nvSpPr>
         <p:spPr>
           <a:xfrm>
-            <a:off x="457200" y="3054891"/>
-            <a:ext cx="11277600" cy="543042"/>
+            <a:off x="457200" y="3303140"/>
+            <a:ext cx="7034784" cy="338741"/>
           </a:xfrm>
           <a:prstGeom prst="rect">
             <a:avLst/>
@@ -234,19 +234,19 @@
         </p:nvSpPr>
         <p:spPr>
           <a:xfrm>
-            <a:off x="495087" y="3238010"/>
-            <a:ext cx="681960" cy="176804"/>
-          </a:xfrm>
-          <a:prstGeom prst="rect">
-            <a:avLst/>
-          </a:prstGeom>
-          <a:noFill/>
-          <a:ln>
-            <a:noFill/>
-          </a:ln>
-        </p:spPr>
-        <p:txBody>
-          <a:bodyPr wrap="none" lIns="12629" tIns="0" rIns="12629" bIns="0" anchor="ctr"/>
+            <a:off x="480833" y="3417367"/>
+            <a:ext cx="425396" cy="110288"/>
+          </a:xfrm>
+          <a:prstGeom prst="rect">
+            <a:avLst/>
+          </a:prstGeom>
+          <a:noFill/>
+          <a:ln>
+            <a:noFill/>
+          </a:ln>
+        </p:spPr>
+        <p:txBody>
+          <a:bodyPr wrap="none" lIns="7878" tIns="0" rIns="7878" bIns="0" anchor="ctr"/>
           <a:lstStyle/>
           <a:p>
             <a:pPr algn="l">
@@ -258,7 +258,7 @@
               </a:spcAft>
             </a:pPr>
             <a:r>
-              <a:rPr lang="en-US" b="1" sz="550" dirty="0">
+              <a:rPr lang="en-US" b="1" sz="350" dirty="0">
                 <a:solidFill>
                   <a:srgbClr val="333333"/>
                 </a:solidFill>
@@ -276,7 +276,7 @@
               </a:spcAft>
             </a:pPr>
             <a:r>
-              <a:rPr lang="en-US" b="1" sz="550" dirty="0">
+              <a:rPr lang="en-US" b="1" sz="350" dirty="0">
                 <a:solidFill>
                   <a:srgbClr val="333333"/>
                 </a:solidFill>
@@ -294,8 +294,8 @@
         </p:nvSpPr>
         <p:spPr>
           <a:xfrm>
-            <a:off x="457200" y="3597933"/>
-            <a:ext cx="11277600" cy="745105"/>
+            <a:off x="457200" y="3641881"/>
+            <a:ext cx="7034784" cy="464784"/>
           </a:xfrm>
           <a:prstGeom prst="rect">
             <a:avLst/>
@@ -318,19 +318,19 @@
         </p:nvSpPr>
         <p:spPr>
           <a:xfrm>
-            <a:off x="495087" y="3882083"/>
-            <a:ext cx="681960" cy="88402"/>
-          </a:xfrm>
-          <a:prstGeom prst="rect">
-            <a:avLst/>
-          </a:prstGeom>
-          <a:noFill/>
-          <a:ln>
-            <a:noFill/>
-          </a:ln>
-        </p:spPr>
-        <p:txBody>
-          <a:bodyPr wrap="none" lIns="12629" tIns="0" rIns="12629" bIns="0" anchor="ctr"/>
+            <a:off x="480833" y="3819130"/>
+            <a:ext cx="425396" cy="55144"/>
+          </a:xfrm>
+          <a:prstGeom prst="rect">
+            <a:avLst/>
+          </a:prstGeom>
+          <a:noFill/>
+          <a:ln>
+            <a:noFill/>
+          </a:ln>
+        </p:spPr>
+        <p:txBody>
+          <a:bodyPr wrap="none" lIns="7878" tIns="0" rIns="7878" bIns="0" anchor="ctr"/>
           <a:lstStyle/>
           <a:p>
             <a:pPr algn="l">
@@ -342,7 +342,7 @@
               </a:spcAft>
             </a:pPr>
             <a:r>
-              <a:rPr lang="en-US" b="1" sz="550" dirty="0">
+              <a:rPr lang="en-US" b="1" sz="350" dirty="0">
                 <a:solidFill>
                   <a:srgbClr val="333333"/>
                 </a:solidFill>
@@ -360,8 +360,8 @@
         </p:nvSpPr>
         <p:spPr>
           <a:xfrm>
-            <a:off x="457200" y="4343038"/>
-            <a:ext cx="11277600" cy="366238"/>
+            <a:off x="457200" y="4106666"/>
+            <a:ext cx="7034784" cy="228453"/>
           </a:xfrm>
           <a:prstGeom prst="rect">
             <a:avLst/>
@@ -384,19 +384,19 @@
         </p:nvSpPr>
         <p:spPr>
           <a:xfrm>
-            <a:off x="495087" y="4437755"/>
-            <a:ext cx="681960" cy="88402"/>
-          </a:xfrm>
-          <a:prstGeom prst="rect">
-            <a:avLst/>
-          </a:prstGeom>
-          <a:noFill/>
-          <a:ln>
-            <a:noFill/>
-          </a:ln>
-        </p:spPr>
-        <p:txBody>
-          <a:bodyPr wrap="none" lIns="12629" tIns="0" rIns="12629" bIns="0" anchor="ctr"/>
+            <a:off x="480833" y="4165748"/>
+            <a:ext cx="425396" cy="55144"/>
+          </a:xfrm>
+          <a:prstGeom prst="rect">
+            <a:avLst/>
+          </a:prstGeom>
+          <a:noFill/>
+          <a:ln>
+            <a:noFill/>
+          </a:ln>
+        </p:spPr>
+        <p:txBody>
+          <a:bodyPr wrap="none" lIns="7878" tIns="0" rIns="7878" bIns="0" anchor="ctr"/>
           <a:lstStyle/>
           <a:p>
             <a:pPr algn="l">
@@ -408,7 +408,7 @@
               </a:spcAft>
             </a:pPr>
             <a:r>
-              <a:rPr lang="en-US" b="1" sz="550" dirty="0">
+              <a:rPr lang="en-US" b="1" sz="350" dirty="0">
                 <a:solidFill>
                   <a:srgbClr val="333333"/>
                 </a:solidFill>
@@ -426,8 +426,8 @@
         </p:nvSpPr>
         <p:spPr>
           <a:xfrm>
-            <a:off x="1214933" y="2511849"/>
-            <a:ext cx="947167" cy="88402"/>
+            <a:off x="929862" y="2964399"/>
+            <a:ext cx="590827" cy="55144"/>
           </a:xfrm>
           <a:prstGeom prst="rect">
             <a:avLst/>
@@ -450,7 +450,7 @@
               </a:spcAft>
             </a:pPr>
             <a:r>
-              <a:rPr lang="en-US" b="1" sz="550" dirty="0">
+              <a:rPr lang="en-US" b="1" sz="350" dirty="0">
                 <a:solidFill>
                   <a:srgbClr val="7F7F7F"/>
                 </a:solidFill>
@@ -468,8 +468,8 @@
         </p:nvSpPr>
         <p:spPr>
           <a:xfrm>
-            <a:off x="2162100" y="2511849"/>
-            <a:ext cx="947167" cy="88402"/>
+            <a:off x="1520689" y="2964399"/>
+            <a:ext cx="590827" cy="55144"/>
           </a:xfrm>
           <a:prstGeom prst="rect">
             <a:avLst/>
@@ -492,7 +492,7 @@
               </a:spcAft>
             </a:pPr>
             <a:r>
-              <a:rPr lang="en-US" b="1" sz="550" dirty="0">
+              <a:rPr lang="en-US" b="1" sz="350" dirty="0">
                 <a:solidFill>
                   <a:srgbClr val="7F7F7F"/>
                 </a:solidFill>
@@ -510,8 +510,8 @@
         </p:nvSpPr>
         <p:spPr>
           <a:xfrm>
-            <a:off x="3109267" y="2511849"/>
-            <a:ext cx="947167" cy="88402"/>
+            <a:off x="2111517" y="2964399"/>
+            <a:ext cx="590827" cy="55144"/>
           </a:xfrm>
           <a:prstGeom prst="rect">
             <a:avLst/>
@@ -534,7 +534,7 @@
               </a:spcAft>
             </a:pPr>
             <a:r>
-              <a:rPr lang="en-US" b="1" sz="550" dirty="0">
+              <a:rPr lang="en-US" b="1" sz="350" dirty="0">
                 <a:solidFill>
                   <a:srgbClr val="7F7F7F"/>
                 </a:solidFill>
@@ -552,8 +552,8 @@
         </p:nvSpPr>
         <p:spPr>
           <a:xfrm>
-            <a:off x="4056434" y="2511849"/>
-            <a:ext cx="947167" cy="88402"/>
+            <a:off x="2702344" y="2964399"/>
+            <a:ext cx="590827" cy="55144"/>
           </a:xfrm>
           <a:prstGeom prst="rect">
             <a:avLst/>
@@ -576,7 +576,7 @@
               </a:spcAft>
             </a:pPr>
             <a:r>
-              <a:rPr lang="en-US" b="1" sz="550" dirty="0">
+              <a:rPr lang="en-US" b="1" sz="350" dirty="0">
                 <a:solidFill>
                   <a:srgbClr val="7F7F7F"/>
                 </a:solidFill>
@@ -594,8 +594,8 @@
         </p:nvSpPr>
         <p:spPr>
           <a:xfrm>
-            <a:off x="5003601" y="2511849"/>
-            <a:ext cx="947167" cy="88402"/>
+            <a:off x="3293171" y="2964399"/>
+            <a:ext cx="590827" cy="55144"/>
           </a:xfrm>
           <a:prstGeom prst="rect">
             <a:avLst/>
@@ -618,7 +618,7 @@
               </a:spcAft>
             </a:pPr>
             <a:r>
-              <a:rPr lang="en-US" b="1" sz="550" dirty="0">
+              <a:rPr lang="en-US" b="1" sz="350" dirty="0">
                 <a:solidFill>
                   <a:srgbClr val="7F7F7F"/>
                 </a:solidFill>
@@ -636,8 +636,8 @@
         </p:nvSpPr>
         <p:spPr>
           <a:xfrm>
-            <a:off x="5950768" y="2511849"/>
-            <a:ext cx="947167" cy="88402"/>
+            <a:off x="3883998" y="2964399"/>
+            <a:ext cx="590827" cy="55144"/>
           </a:xfrm>
           <a:prstGeom prst="rect">
             <a:avLst/>
@@ -660,7 +660,7 @@
               </a:spcAft>
             </a:pPr>
             <a:r>
-              <a:rPr lang="en-US" b="1" sz="550" dirty="0">
+              <a:rPr lang="en-US" b="1" sz="350" dirty="0">
                 <a:solidFill>
                   <a:srgbClr val="7F7F7F"/>
                 </a:solidFill>
@@ -678,8 +678,8 @@
         </p:nvSpPr>
         <p:spPr>
           <a:xfrm>
-            <a:off x="6897935" y="2511849"/>
-            <a:ext cx="947167" cy="88402"/>
+            <a:off x="4474826" y="2964399"/>
+            <a:ext cx="590827" cy="55144"/>
           </a:xfrm>
           <a:prstGeom prst="rect">
             <a:avLst/>
@@ -702,7 +702,7 @@
               </a:spcAft>
             </a:pPr>
             <a:r>
-              <a:rPr lang="en-US" b="1" sz="550" dirty="0">
+              <a:rPr lang="en-US" b="1" sz="350" dirty="0">
                 <a:solidFill>
                   <a:srgbClr val="7F7F7F"/>
                 </a:solidFill>
@@ -720,8 +720,8 @@
         </p:nvSpPr>
         <p:spPr>
           <a:xfrm>
-            <a:off x="7845101" y="2511849"/>
-            <a:ext cx="947167" cy="88402"/>
+            <a:off x="5065653" y="2964399"/>
+            <a:ext cx="590827" cy="55144"/>
           </a:xfrm>
           <a:prstGeom prst="rect">
             <a:avLst/>
@@ -744,7 +744,7 @@
               </a:spcAft>
             </a:pPr>
             <a:r>
-              <a:rPr lang="en-US" b="1" sz="550" dirty="0">
+              <a:rPr lang="en-US" b="1" sz="350" dirty="0">
                 <a:solidFill>
                   <a:srgbClr val="7F7F7F"/>
                 </a:solidFill>
@@ -762,8 +762,8 @@
         </p:nvSpPr>
         <p:spPr>
           <a:xfrm>
-            <a:off x="8792268" y="2511849"/>
-            <a:ext cx="947167" cy="88402"/>
+            <a:off x="5656480" y="2964399"/>
+            <a:ext cx="590827" cy="55144"/>
           </a:xfrm>
           <a:prstGeom prst="rect">
             <a:avLst/>
@@ -786,7 +786,7 @@
               </a:spcAft>
             </a:pPr>
             <a:r>
-              <a:rPr lang="en-US" b="1" sz="550" dirty="0">
+              <a:rPr lang="en-US" b="1" sz="350" dirty="0">
                 <a:solidFill>
                   <a:srgbClr val="7F7F7F"/>
                 </a:solidFill>
@@ -804,8 +804,8 @@
         </p:nvSpPr>
         <p:spPr>
           <a:xfrm>
-            <a:off x="9739435" y="2511849"/>
-            <a:ext cx="947167" cy="88402"/>
+            <a:off x="6247308" y="2964399"/>
+            <a:ext cx="590827" cy="55144"/>
           </a:xfrm>
           <a:prstGeom prst="rect">
             <a:avLst/>
@@ -828,7 +828,7 @@
               </a:spcAft>
             </a:pPr>
             <a:r>
-              <a:rPr lang="en-US" b="1" sz="550" dirty="0">
+              <a:rPr lang="en-US" b="1" sz="350" dirty="0">
                 <a:solidFill>
                   <a:srgbClr val="7F7F7F"/>
                 </a:solidFill>
@@ -846,8 +846,8 @@
         </p:nvSpPr>
         <p:spPr>
           <a:xfrm>
-            <a:off x="10686602" y="2511849"/>
-            <a:ext cx="947167" cy="88402"/>
+            <a:off x="6838135" y="2964399"/>
+            <a:ext cx="590827" cy="55144"/>
           </a:xfrm>
           <a:prstGeom prst="rect">
             <a:avLst/>
@@ -870,7 +870,7 @@
               </a:spcAft>
             </a:pPr>
             <a:r>
-              <a:rPr lang="en-US" b="1" sz="550" dirty="0">
+              <a:rPr lang="en-US" b="1" sz="350" dirty="0">
                 <a:solidFill>
                   <a:srgbClr val="7F7F7F"/>
                 </a:solidFill>
@@ -888,13 +888,13 @@
         </p:nvCxnSpPr>
         <p:spPr>
           <a:xfrm>
-            <a:off x="1859533" y="2953860"/>
-            <a:ext cx="420963" cy="202062"/>
+            <a:off x="1331953" y="3240119"/>
+            <a:ext cx="262590" cy="126043"/>
           </a:xfrm>
           <a:prstGeom prst="line">
             <a:avLst/>
           </a:prstGeom>
-          <a:ln w="6314">
+          <a:ln w="3939">
             <a:solidFill>
               <a:srgbClr val="595959"/>
             </a:solidFill>
@@ -911,13 +911,13 @@
         </p:nvCxnSpPr>
         <p:spPr>
           <a:xfrm>
-            <a:off x="2933050" y="3496902"/>
-            <a:ext cx="352434" cy="202063"/>
+            <a:off x="2001595" y="3578860"/>
+            <a:ext cx="219843" cy="126043"/>
           </a:xfrm>
           <a:prstGeom prst="line">
             <a:avLst/>
           </a:prstGeom>
-          <a:ln w="6314">
+          <a:ln w="3939">
             <a:solidFill>
               <a:srgbClr val="595959"/>
             </a:solidFill>
@@ -934,13 +934,13 @@
         </p:nvCxnSpPr>
         <p:spPr>
           <a:xfrm flipV="1">
-            <a:off x="3838586" y="3320098"/>
-            <a:ext cx="568300" cy="378867"/>
+            <a:off x="2566454" y="3468572"/>
+            <a:ext cx="354496" cy="236331"/>
           </a:xfrm>
           <a:prstGeom prst="line">
             <a:avLst/>
           </a:prstGeom>
-          <a:ln w="6314">
+          <a:ln w="3939">
             <a:solidFill>
               <a:srgbClr val="595959"/>
             </a:solidFill>
@@ -957,13 +957,13 @@
         </p:nvCxnSpPr>
         <p:spPr>
           <a:xfrm flipV="1">
-            <a:off x="4742313" y="2953860"/>
-            <a:ext cx="522575" cy="202062"/>
+            <a:off x="3130184" y="3240119"/>
+            <a:ext cx="325974" cy="126043"/>
           </a:xfrm>
           <a:prstGeom prst="line">
             <a:avLst/>
           </a:prstGeom>
-          <a:ln w="6314">
+          <a:ln w="3939">
             <a:solidFill>
               <a:srgbClr val="595959"/>
             </a:solidFill>
@@ -980,13 +980,13 @@
         </p:nvCxnSpPr>
         <p:spPr>
           <a:xfrm flipV="1">
-            <a:off x="4934142" y="2949903"/>
-            <a:ext cx="1086085" cy="209976"/>
+            <a:off x="3249844" y="3237650"/>
+            <a:ext cx="677482" cy="130980"/>
           </a:xfrm>
           <a:prstGeom prst="line">
             <a:avLst/>
           </a:prstGeom>
-          <a:ln w="6314">
+          <a:ln w="3939">
             <a:solidFill>
               <a:srgbClr val="595959"/>
             </a:solidFill>
@@ -1003,13 +1003,13 @@
         </p:nvCxnSpPr>
         <p:spPr>
           <a:xfrm>
-            <a:off x="6636647" y="2953860"/>
-            <a:ext cx="522575" cy="202062"/>
+            <a:off x="4311839" y="3240119"/>
+            <a:ext cx="325974" cy="126043"/>
           </a:xfrm>
           <a:prstGeom prst="line">
             <a:avLst/>
           </a:prstGeom>
-          <a:ln w="6314">
+          <a:ln w="3939">
             <a:solidFill>
               <a:srgbClr val="595959"/>
             </a:solidFill>
@@ -1026,13 +1026,13 @@
         </p:nvCxnSpPr>
         <p:spPr>
           <a:xfrm>
-            <a:off x="7431877" y="3320098"/>
-            <a:ext cx="826449" cy="1123971"/>
+            <a:off x="4807890" y="3468572"/>
+            <a:ext cx="515526" cy="701115"/>
           </a:xfrm>
           <a:prstGeom prst="line">
             <a:avLst/>
           </a:prstGeom>
-          <a:ln w="6314">
+          <a:ln w="3939">
             <a:solidFill>
               <a:srgbClr val="595959"/>
             </a:solidFill>
@@ -1049,13 +1049,13 @@
         </p:nvCxnSpPr>
         <p:spPr>
           <a:xfrm flipV="1">
-            <a:off x="4934142" y="2903024"/>
-            <a:ext cx="3927585" cy="303734"/>
+            <a:off x="3249844" y="3208408"/>
+            <a:ext cx="2449964" cy="189464"/>
           </a:xfrm>
           <a:prstGeom prst="line">
             <a:avLst/>
           </a:prstGeom>
-          <a:ln w="6314">
+          <a:ln w="3939">
             <a:solidFill>
               <a:srgbClr val="595959"/>
             </a:solidFill>
@@ -1072,13 +1072,13 @@
         </p:nvCxnSpPr>
         <p:spPr>
           <a:xfrm>
-            <a:off x="9478148" y="2953860"/>
-            <a:ext cx="522575" cy="202062"/>
+            <a:off x="6084321" y="3240119"/>
+            <a:ext cx="325974" cy="126043"/>
           </a:xfrm>
           <a:prstGeom prst="line">
             <a:avLst/>
           </a:prstGeom>
-          <a:ln w="6314">
+          <a:ln w="3939">
             <a:solidFill>
               <a:srgbClr val="595959"/>
             </a:solidFill>
@@ -1095,13 +1095,13 @@
         </p:nvCxnSpPr>
         <p:spPr>
           <a:xfrm>
-            <a:off x="10273377" y="3320098"/>
-            <a:ext cx="826450" cy="1123971"/>
+            <a:off x="6580372" y="3468572"/>
+            <a:ext cx="515526" cy="701115"/>
           </a:xfrm>
           <a:prstGeom prst="line">
             <a:avLst/>
           </a:prstGeom>
-          <a:ln w="6314">
+          <a:ln w="3939">
             <a:solidFill>
               <a:srgbClr val="595959"/>
             </a:solidFill>
@@ -1118,8 +1118,8 @@
         </p:nvSpPr>
         <p:spPr>
           <a:xfrm>
-            <a:off x="1284392" y="2789684"/>
-            <a:ext cx="808249" cy="164176"/>
+            <a:off x="973189" y="3137709"/>
+            <a:ext cx="504173" cy="102410"/>
           </a:xfrm>
           <a:prstGeom prst="roundRect">
             <a:avLst/>
@@ -1142,8 +1142,8 @@
         </p:nvSpPr>
         <p:spPr>
           <a:xfrm>
-            <a:off x="1309650" y="2827571"/>
-            <a:ext cx="757733" cy="88402"/>
+            <a:off x="988945" y="3161342"/>
+            <a:ext cx="472662" cy="55144"/>
           </a:xfrm>
           <a:prstGeom prst="rect">
             <a:avLst/>
@@ -1166,7 +1166,7 @@
               </a:spcAft>
             </a:pPr>
             <a:r>
-              <a:rPr lang="en-US" b="1" sz="600" dirty="0">
+              <a:rPr lang="en-US" b="1" sz="350" dirty="0">
                 <a:solidFill>
                   <a:srgbClr val="333333"/>
                 </a:solidFill>
@@ -1184,8 +1184,8 @@
         </p:nvSpPr>
         <p:spPr>
           <a:xfrm>
-            <a:off x="2231559" y="3155922"/>
-            <a:ext cx="808249" cy="340980"/>
+            <a:off x="1564017" y="3366162"/>
+            <a:ext cx="504173" cy="212698"/>
           </a:xfrm>
           <a:prstGeom prst="roundRect">
             <a:avLst/>
@@ -1208,8 +1208,8 @@
         </p:nvSpPr>
         <p:spPr>
           <a:xfrm>
-            <a:off x="2256817" y="3193809"/>
-            <a:ext cx="757733" cy="88402"/>
+            <a:off x="1579772" y="3389795"/>
+            <a:ext cx="472662" cy="55144"/>
           </a:xfrm>
           <a:prstGeom prst="rect">
             <a:avLst/>
@@ -1232,7 +1232,7 @@
               </a:spcAft>
             </a:pPr>
             <a:r>
-              <a:rPr lang="en-US" b="1" sz="600" dirty="0">
+              <a:rPr lang="en-US" b="1" sz="350" dirty="0">
                 <a:solidFill>
                   <a:srgbClr val="333333"/>
                 </a:solidFill>
@@ -1250,8 +1250,8 @@
         </p:nvSpPr>
         <p:spPr>
           <a:xfrm>
-            <a:off x="2256817" y="3294840"/>
-            <a:ext cx="757733" cy="151547"/>
+            <a:off x="1579772" y="3452817"/>
+            <a:ext cx="472662" cy="94532"/>
           </a:xfrm>
           <a:prstGeom prst="rect">
             <a:avLst/>
@@ -1274,7 +1274,7 @@
               </a:spcAft>
             </a:pPr>
             <a:r>
-              <a:rPr lang="en-US" sz="450" dirty="0">
+              <a:rPr lang="en-US" sz="300" dirty="0">
                 <a:solidFill>
                   <a:srgbClr val="404040"/>
                 </a:solidFill>
@@ -1292,7 +1292,7 @@
               </a:spcAft>
             </a:pPr>
             <a:r>
-              <a:rPr lang="en-US" sz="450" dirty="0">
+              <a:rPr lang="en-US" sz="300" dirty="0">
                 <a:solidFill>
                   <a:srgbClr val="404040"/>
                 </a:solidFill>
@@ -1310,8 +1310,8 @@
         </p:nvSpPr>
         <p:spPr>
           <a:xfrm>
-            <a:off x="3178726" y="3698965"/>
-            <a:ext cx="808249" cy="340980"/>
+            <a:off x="2154844" y="3704903"/>
+            <a:ext cx="504173" cy="212698"/>
           </a:xfrm>
           <a:prstGeom prst="roundRect">
             <a:avLst/>
@@ -1334,8 +1334,8 @@
         </p:nvSpPr>
         <p:spPr>
           <a:xfrm>
-            <a:off x="3203984" y="3736851"/>
-            <a:ext cx="757733" cy="88402"/>
+            <a:off x="2170599" y="3728536"/>
+            <a:ext cx="472662" cy="55144"/>
           </a:xfrm>
           <a:prstGeom prst="rect">
             <a:avLst/>
@@ -1358,7 +1358,7 @@
               </a:spcAft>
             </a:pPr>
             <a:r>
-              <a:rPr lang="en-US" b="1" sz="600" dirty="0">
+              <a:rPr lang="en-US" b="1" sz="350" dirty="0">
                 <a:solidFill>
                   <a:srgbClr val="333333"/>
                 </a:solidFill>
@@ -1376,8 +1376,8 @@
         </p:nvSpPr>
         <p:spPr>
           <a:xfrm>
-            <a:off x="3203984" y="3837882"/>
-            <a:ext cx="757733" cy="151547"/>
+            <a:off x="2170599" y="3791558"/>
+            <a:ext cx="472662" cy="94532"/>
           </a:xfrm>
           <a:prstGeom prst="rect">
             <a:avLst/>
@@ -1400,7 +1400,7 @@
               </a:spcAft>
             </a:pPr>
             <a:r>
-              <a:rPr lang="en-US" sz="450" dirty="0">
+              <a:rPr lang="en-US" sz="300" dirty="0">
                 <a:solidFill>
                   <a:srgbClr val="404040"/>
                 </a:solidFill>
@@ -1418,7 +1418,7 @@
               </a:spcAft>
             </a:pPr>
             <a:r>
-              <a:rPr lang="en-US" sz="450" dirty="0">
+              <a:rPr lang="en-US" sz="300" dirty="0">
                 <a:solidFill>
                   <a:srgbClr val="404040"/>
                 </a:solidFill>
@@ -1436,8 +1436,8 @@
         </p:nvSpPr>
         <p:spPr>
           <a:xfrm>
-            <a:off x="3178726" y="4077831"/>
-            <a:ext cx="808249" cy="176804"/>
+            <a:off x="2154844" y="3941234"/>
+            <a:ext cx="504173" cy="110288"/>
           </a:xfrm>
           <a:prstGeom prst="rect">
             <a:avLst/>
@@ -1460,19 +1460,19 @@
         </p:nvSpPr>
         <p:spPr>
           <a:xfrm>
-            <a:off x="3203984" y="4090460"/>
-            <a:ext cx="757733" cy="151547"/>
-          </a:xfrm>
-          <a:prstGeom prst="rect">
-            <a:avLst/>
-          </a:prstGeom>
-          <a:noFill/>
-          <a:ln>
-            <a:noFill/>
-          </a:ln>
-        </p:spPr>
-        <p:txBody>
-          <a:bodyPr wrap="none" lIns="12629" tIns="0" rIns="12629" bIns="0" anchor="ctr"/>
+            <a:off x="2170599" y="3949112"/>
+            <a:ext cx="472662" cy="94532"/>
+          </a:xfrm>
+          <a:prstGeom prst="rect">
+            <a:avLst/>
+          </a:prstGeom>
+          <a:noFill/>
+          <a:ln>
+            <a:noFill/>
+          </a:ln>
+        </p:spPr>
+        <p:txBody>
+          <a:bodyPr wrap="none" lIns="7878" tIns="0" rIns="7878" bIns="0" anchor="ctr"/>
           <a:lstStyle/>
           <a:p>
             <a:pPr algn="l">
@@ -1484,7 +1484,7 @@
               </a:spcAft>
             </a:pPr>
             <a:r>
-              <a:rPr lang="en-US" sz="450" dirty="0">
+              <a:rPr lang="en-US" sz="300" dirty="0">
                 <a:solidFill>
                   <a:srgbClr val="333333"/>
                 </a:solidFill>
@@ -1502,7 +1502,7 @@
               </a:spcAft>
             </a:pPr>
             <a:r>
-              <a:rPr lang="en-US" sz="450" dirty="0">
+              <a:rPr lang="en-US" sz="300" dirty="0">
                 <a:solidFill>
                   <a:srgbClr val="333333"/>
                 </a:solidFill>
@@ -1520,8 +1520,8 @@
         </p:nvSpPr>
         <p:spPr>
           <a:xfrm>
-            <a:off x="4125893" y="3155922"/>
-            <a:ext cx="808249" cy="164176"/>
+            <a:off x="2745671" y="3366162"/>
+            <a:ext cx="504173" cy="102410"/>
           </a:xfrm>
           <a:prstGeom prst="roundRect">
             <a:avLst/>
@@ -1544,8 +1544,8 @@
         </p:nvSpPr>
         <p:spPr>
           <a:xfrm>
-            <a:off x="4151151" y="3193809"/>
-            <a:ext cx="757733" cy="88402"/>
+            <a:off x="2761427" y="3389795"/>
+            <a:ext cx="472662" cy="55144"/>
           </a:xfrm>
           <a:prstGeom prst="rect">
             <a:avLst/>
@@ -1568,7 +1568,7 @@
               </a:spcAft>
             </a:pPr>
             <a:r>
-              <a:rPr lang="en-US" b="1" sz="600" dirty="0">
+              <a:rPr lang="en-US" b="1" sz="350" dirty="0">
                 <a:solidFill>
                   <a:srgbClr val="333333"/>
                 </a:solidFill>
@@ -1586,8 +1586,8 @@
         </p:nvSpPr>
         <p:spPr>
           <a:xfrm>
-            <a:off x="5073060" y="2789684"/>
-            <a:ext cx="808249" cy="164176"/>
+            <a:off x="3336498" y="3137709"/>
+            <a:ext cx="504173" cy="102410"/>
           </a:xfrm>
           <a:prstGeom prst="roundRect">
             <a:avLst/>
@@ -1610,8 +1610,8 @@
         </p:nvSpPr>
         <p:spPr>
           <a:xfrm>
-            <a:off x="5098318" y="2827571"/>
-            <a:ext cx="757733" cy="88402"/>
+            <a:off x="3352254" y="3161342"/>
+            <a:ext cx="472662" cy="55144"/>
           </a:xfrm>
           <a:prstGeom prst="rect">
             <a:avLst/>
@@ -1634,7 +1634,7 @@
               </a:spcAft>
             </a:pPr>
             <a:r>
-              <a:rPr lang="en-US" b="1" sz="450" dirty="0">
+              <a:rPr lang="en-US" b="1" sz="300" dirty="0">
                 <a:solidFill>
                   <a:srgbClr val="333333"/>
                 </a:solidFill>
@@ -1652,8 +1652,8 @@
         </p:nvSpPr>
         <p:spPr>
           <a:xfrm>
-            <a:off x="6020227" y="2789684"/>
-            <a:ext cx="808249" cy="164176"/>
+            <a:off x="3927326" y="3137709"/>
+            <a:ext cx="504173" cy="102410"/>
           </a:xfrm>
           <a:prstGeom prst="roundRect">
             <a:avLst/>
@@ -1676,8 +1676,8 @@
         </p:nvSpPr>
         <p:spPr>
           <a:xfrm>
-            <a:off x="6045484" y="2827571"/>
-            <a:ext cx="757733" cy="88402"/>
+            <a:off x="3943081" y="3161342"/>
+            <a:ext cx="472662" cy="55144"/>
           </a:xfrm>
           <a:prstGeom prst="rect">
             <a:avLst/>
@@ -1700,7 +1700,7 @@
               </a:spcAft>
             </a:pPr>
             <a:r>
-              <a:rPr lang="en-US" b="1" sz="550" dirty="0">
+              <a:rPr lang="en-US" b="1" sz="350" dirty="0">
                 <a:solidFill>
                   <a:srgbClr val="333333"/>
                 </a:solidFill>
@@ -1718,8 +1718,8 @@
         </p:nvSpPr>
         <p:spPr>
           <a:xfrm>
-            <a:off x="6967394" y="3155922"/>
-            <a:ext cx="808249" cy="164176"/>
+            <a:off x="4518153" y="3366162"/>
+            <a:ext cx="504173" cy="102410"/>
           </a:xfrm>
           <a:prstGeom prst="roundRect">
             <a:avLst/>
@@ -1742,8 +1742,8 @@
         </p:nvSpPr>
         <p:spPr>
           <a:xfrm>
-            <a:off x="6992651" y="3193809"/>
-            <a:ext cx="757733" cy="88402"/>
+            <a:off x="4533909" y="3389795"/>
+            <a:ext cx="472662" cy="55144"/>
           </a:xfrm>
           <a:prstGeom prst="rect">
             <a:avLst/>
@@ -1766,7 +1766,7 @@
               </a:spcAft>
             </a:pPr>
             <a:r>
-              <a:rPr lang="en-US" b="1" sz="600" dirty="0">
+              <a:rPr lang="en-US" b="1" sz="350" dirty="0">
                 <a:solidFill>
                   <a:srgbClr val="333333"/>
                 </a:solidFill>
@@ -1784,8 +1784,8 @@
         </p:nvSpPr>
         <p:spPr>
           <a:xfrm>
-            <a:off x="7914560" y="4444069"/>
-            <a:ext cx="808249" cy="164176"/>
+            <a:off x="5108980" y="4169687"/>
+            <a:ext cx="504173" cy="102410"/>
           </a:xfrm>
           <a:prstGeom prst="roundRect">
             <a:avLst/>
@@ -1808,8 +1808,8 @@
         </p:nvSpPr>
         <p:spPr>
           <a:xfrm>
-            <a:off x="7939818" y="4481956"/>
-            <a:ext cx="757733" cy="88402"/>
+            <a:off x="5124736" y="4193320"/>
+            <a:ext cx="472662" cy="55144"/>
           </a:xfrm>
           <a:prstGeom prst="rect">
             <a:avLst/>
@@ -1832,7 +1832,7 @@
               </a:spcAft>
             </a:pPr>
             <a:r>
-              <a:rPr lang="en-US" b="1" sz="550" dirty="0">
+              <a:rPr lang="en-US" b="1" sz="350" dirty="0">
                 <a:solidFill>
                   <a:srgbClr val="333333"/>
                 </a:solidFill>
@@ -1850,8 +1850,8 @@
         </p:nvSpPr>
         <p:spPr>
           <a:xfrm>
-            <a:off x="8861727" y="2789684"/>
-            <a:ext cx="808249" cy="164176"/>
+            <a:off x="5699808" y="3137709"/>
+            <a:ext cx="504173" cy="102410"/>
           </a:xfrm>
           <a:prstGeom prst="roundRect">
             <a:avLst/>
@@ -1874,8 +1874,8 @@
         </p:nvSpPr>
         <p:spPr>
           <a:xfrm>
-            <a:off x="8886985" y="2827571"/>
-            <a:ext cx="757733" cy="88402"/>
+            <a:off x="5715563" y="3161342"/>
+            <a:ext cx="472662" cy="55144"/>
           </a:xfrm>
           <a:prstGeom prst="rect">
             <a:avLst/>
@@ -1898,7 +1898,7 @@
               </a:spcAft>
             </a:pPr>
             <a:r>
-              <a:rPr lang="en-US" b="1" sz="600" dirty="0">
+              <a:rPr lang="en-US" b="1" sz="350" dirty="0">
                 <a:solidFill>
                   <a:srgbClr val="333333"/>
                 </a:solidFill>
@@ -1916,8 +1916,8 @@
         </p:nvSpPr>
         <p:spPr>
           <a:xfrm>
-            <a:off x="9808894" y="3155922"/>
-            <a:ext cx="808249" cy="164176"/>
+            <a:off x="6290635" y="3366162"/>
+            <a:ext cx="504173" cy="102410"/>
           </a:xfrm>
           <a:prstGeom prst="roundRect">
             <a:avLst/>
@@ -1940,8 +1940,8 @@
         </p:nvSpPr>
         <p:spPr>
           <a:xfrm>
-            <a:off x="9834152" y="3193809"/>
-            <a:ext cx="757733" cy="88402"/>
+            <a:off x="6306391" y="3389795"/>
+            <a:ext cx="472662" cy="55144"/>
           </a:xfrm>
           <a:prstGeom prst="rect">
             <a:avLst/>
@@ -1964,7 +1964,7 @@
               </a:spcAft>
             </a:pPr>
             <a:r>
-              <a:rPr lang="en-US" b="1" sz="600" dirty="0">
+              <a:rPr lang="en-US" b="1" sz="350" dirty="0">
                 <a:solidFill>
                   <a:srgbClr val="333333"/>
                 </a:solidFill>
@@ -1982,8 +1982,8 @@
         </p:nvSpPr>
         <p:spPr>
           <a:xfrm>
-            <a:off x="10756061" y="4444069"/>
-            <a:ext cx="808249" cy="164176"/>
+            <a:off x="6881462" y="4169687"/>
+            <a:ext cx="504173" cy="102410"/>
           </a:xfrm>
           <a:prstGeom prst="roundRect">
             <a:avLst/>
@@ -2006,8 +2006,8 @@
         </p:nvSpPr>
         <p:spPr>
           <a:xfrm>
-            <a:off x="10781319" y="4481956"/>
-            <a:ext cx="757733" cy="88402"/>
+            <a:off x="6897218" y="4193320"/>
+            <a:ext cx="472662" cy="55144"/>
           </a:xfrm>
           <a:prstGeom prst="rect">
             <a:avLst/>
@@ -2030,7 +2030,7 @@
               </a:spcAft>
             </a:pPr>
             <a:r>
-              <a:rPr lang="en-US" b="1" sz="600" dirty="0">
+              <a:rPr lang="en-US" b="1" sz="350" dirty="0">
                 <a:solidFill>
                   <a:srgbClr val="333333"/>
                 </a:solidFill>
@@ -2048,19 +2048,19 @@
         </p:nvSpPr>
         <p:spPr>
           <a:xfrm>
-            <a:off x="558231" y="4734534"/>
-            <a:ext cx="11075538" cy="82088"/>
-          </a:xfrm>
-          <a:prstGeom prst="rect">
-            <a:avLst/>
-          </a:prstGeom>
-          <a:noFill/>
-          <a:ln>
-            <a:noFill/>
-          </a:ln>
-        </p:spPr>
-        <p:txBody>
-          <a:bodyPr wrap="none" lIns="12629" tIns="0" rIns="12629" bIns="0" anchor="ctr"/>
+            <a:off x="520222" y="4350874"/>
+            <a:ext cx="6908741" cy="51205"/>
+          </a:xfrm>
+          <a:prstGeom prst="rect">
+            <a:avLst/>
+          </a:prstGeom>
+          <a:noFill/>
+          <a:ln>
+            <a:noFill/>
+          </a:ln>
+        </p:spPr>
+        <p:txBody>
+          <a:bodyPr wrap="none" lIns="7878" tIns="0" rIns="7878" bIns="0" anchor="ctr"/>
           <a:lstStyle/>
           <a:p>
             <a:pPr algn="l">
@@ -2072,12 +2072,302 @@
               </a:spcAft>
             </a:pPr>
             <a:r>
-              <a:rPr lang="en-US" i="1" sz="550" dirty="0">
+              <a:rPr lang="en-US" i="1" sz="350" dirty="0">
                 <a:solidFill>
                   <a:srgbClr val="404040"/>
                 </a:solidFill>
               </a:rPr>
               <a:t>Scenario @03: Given Event ItemAdded; When Command AddItem; Then Event ItemAdded</a:t>
+            </a:r>
+          </a:p>
+        </p:txBody>
+      </p:sp>
+      <p:sp>
+        <p:nvSpPr>
+          <p:cNvPr id="4" name="Mermaid source"/>
+          <p:cNvSpPr/>
+          <p:nvPr/>
+        </p:nvSpPr>
+        <p:spPr>
+          <a:xfrm>
+            <a:off x="7674864" y="1028700"/>
+            <a:ext cx="4059936" cy="5372100"/>
+          </a:xfrm>
+          <a:prstGeom prst="rect">
+            <a:avLst/>
+          </a:prstGeom>
+          <a:solidFill>
+            <a:srgbClr val="F3F4F6"/>
+          </a:solidFill>
+          <a:ln w="9525">
+            <a:solidFill>
+              <a:srgbClr val="D1D5DB"/>
+            </a:solidFill>
+          </a:ln>
+        </p:spPr>
+        <p:txBody>
+          <a:bodyPr wrap="square" lIns="91440" tIns="45720" rIns="91440" bIns="45720" anchor="t">
+            <a:noAutofit/>
+          </a:bodyPr>
+          <a:lstStyle/>
+          <a:p>
+            <a:pPr algn="l"/>
+            <a:r>
+              <a:rPr lang="en-US" sz="1400" dirty="0">
+                <a:solidFill>
+                  <a:srgbClr val="1F2937"/>
+                </a:solidFill>
+                <a:latin typeface="Consolas"/>
+                <a:cs typeface="Consolas"/>
+              </a:rPr>
+              <a:t>eventmodeling</a:t>
+            </a:r>
+          </a:p>
+          <a:p>
+            <a:pPr algn="l"/>
+            <a:r>
+              <a:rPr lang="en-US" sz="1400" dirty="0">
+                <a:solidFill>
+                  <a:srgbClr val="1F2937"/>
+                </a:solidFill>
+                <a:latin typeface="Consolas"/>
+                <a:cs typeface="Consolas"/>
+              </a:rPr>
+              <a:t>tf 01 ui CartScreen</a:t>
+            </a:r>
+          </a:p>
+          <a:p>
+            <a:pPr algn="l"/>
+            <a:r>
+              <a:rPr lang="en-US" sz="1400" dirty="0">
+                <a:solidFill>
+                  <a:srgbClr val="1F2937"/>
+                </a:solidFill>
+                <a:latin typeface="Consolas"/>
+                <a:cs typeface="Consolas"/>
+              </a:rPr>
+              <a:t>tf 02 cmd AddItem [[AddItem01]]</a:t>
+            </a:r>
+          </a:p>
+          <a:p>
+            <a:pPr algn="l"/>
+            <a:r>
+              <a:rPr lang="en-US" sz="1400" dirty="0">
+                <a:solidFill>
+                  <a:srgbClr val="1F2937"/>
+                </a:solidFill>
+                <a:latin typeface="Consolas"/>
+                <a:cs typeface="Consolas"/>
+              </a:rPr>
+              <a:t>tf 03 evt ItemAdded -&gt;&gt; 02 {"itemId": "42", "qty": 1}</a:t>
+            </a:r>
+          </a:p>
+          <a:p>
+            <a:pPr algn="l"/>
+            <a:r>
+              <a:rPr lang="en-US" sz="1400" dirty="0">
+                <a:solidFill>
+                  <a:srgbClr val="1F2937"/>
+                </a:solidFill>
+                <a:latin typeface="Consolas"/>
+                <a:cs typeface="Consolas"/>
+              </a:rPr>
+              <a:t>tf 04 rmo CartItems -&gt;&gt; 03</a:t>
+            </a:r>
+          </a:p>
+          <a:p>
+            <a:pPr algn="l"/>
+            <a:r>
+              <a:rPr lang="en-US" sz="1400" dirty="0">
+                <a:solidFill>
+                  <a:srgbClr val="1F2937"/>
+                </a:solidFill>
+                <a:latin typeface="Consolas"/>
+                <a:cs typeface="Consolas"/>
+              </a:rPr>
+              <a:t>tf 05 ui CartScreenUpdated -&gt;&gt; 04</a:t>
+            </a:r>
+          </a:p>
+          <a:p>
+            <a:pPr algn="l"/>
+            <a:r>
+              <a:rPr lang="en-US" sz="1400" dirty="0">
+                <a:solidFill>
+                  <a:srgbClr val="1F2937"/>
+                </a:solidFill>
+                <a:latin typeface="Consolas"/>
+                <a:cs typeface="Consolas"/>
+              </a:rPr>
+              <a:t>tf 06 pcr PriceCalculator -&gt;&gt; 04</a:t>
+            </a:r>
+          </a:p>
+          <a:p>
+            <a:pPr algn="l"/>
+            <a:r>
+              <a:rPr lang="en-US" sz="1400" dirty="0">
+                <a:solidFill>
+                  <a:srgbClr val="1F2937"/>
+                </a:solidFill>
+                <a:latin typeface="Consolas"/>
+                <a:cs typeface="Consolas"/>
+              </a:rPr>
+              <a:t>tf 07 cmd ApplyDiscount -&gt;&gt; 06</a:t>
+            </a:r>
+          </a:p>
+          <a:p>
+            <a:pPr algn="l"/>
+            <a:r>
+              <a:rPr lang="en-US" sz="1400" dirty="0">
+                <a:solidFill>
+                  <a:srgbClr val="1F2937"/>
+                </a:solidFill>
+                <a:latin typeface="Consolas"/>
+                <a:cs typeface="Consolas"/>
+              </a:rPr>
+              <a:t>tf 08 evt Billing.DiscountApplied -&gt;&gt; 07</a:t>
+            </a:r>
+          </a:p>
+          <a:p>
+            <a:pPr algn="l"/>
+            <a:r>
+              <a:rPr lang="en-US" sz="1400" dirty="0">
+                <a:solidFill>
+                  <a:srgbClr val="1F2937"/>
+                </a:solidFill>
+                <a:latin typeface="Consolas"/>
+                <a:cs typeface="Consolas"/>
+              </a:rPr>
+              <a:t>rf 09 ui Checkout -&gt;&gt; 04</a:t>
+            </a:r>
+          </a:p>
+          <a:p>
+            <a:pPr algn="l"/>
+            <a:r>
+              <a:rPr lang="en-US" sz="1400" dirty="0">
+                <a:solidFill>
+                  <a:srgbClr val="1F2937"/>
+                </a:solidFill>
+                <a:latin typeface="Consolas"/>
+                <a:cs typeface="Consolas"/>
+              </a:rPr>
+              <a:t>tf 10 cmd Pay -&gt;&gt; 09</a:t>
+            </a:r>
+          </a:p>
+          <a:p>
+            <a:pPr algn="l"/>
+            <a:r>
+              <a:rPr lang="en-US" sz="1400" dirty="0">
+                <a:solidFill>
+                  <a:srgbClr val="1F2937"/>
+                </a:solidFill>
+                <a:latin typeface="Consolas"/>
+                <a:cs typeface="Consolas"/>
+              </a:rPr>
+              <a:t>tf 11 evt Billing.Paid -&gt;&gt; 10</a:t>
+            </a:r>
+          </a:p>
+          <a:p>
+            <a:pPr algn="l"/>
+            <a:r>
+              <a:rPr lang="en-US" sz="1400" dirty="0">
+                <a:solidFill>
+                  <a:srgbClr val="1F2937"/>
+                </a:solidFill>
+                <a:latin typeface="Consolas"/>
+                <a:cs typeface="Consolas"/>
+              </a:rPr>
+              <a:t>data AddItem01 {</a:t>
+            </a:r>
+          </a:p>
+          <a:p>
+            <a:pPr algn="l"/>
+            <a:r>
+              <a:rPr lang="en-US" sz="1400" dirty="0">
+                <a:solidFill>
+                  <a:srgbClr val="1F2937"/>
+                </a:solidFill>
+                <a:latin typeface="Consolas"/>
+                <a:cs typeface="Consolas"/>
+              </a:rPr>
+              <a:t>  description: 'john'</a:t>
+            </a:r>
+          </a:p>
+          <a:p>
+            <a:pPr algn="l"/>
+            <a:r>
+              <a:rPr lang="en-US" sz="1400" dirty="0">
+                <a:solidFill>
+                  <a:srgbClr val="1F2937"/>
+                </a:solidFill>
+                <a:latin typeface="Consolas"/>
+                <a:cs typeface="Consolas"/>
+              </a:rPr>
+              <a:t>  price: 20.4</a:t>
+            </a:r>
+          </a:p>
+          <a:p>
+            <a:pPr algn="l"/>
+            <a:r>
+              <a:rPr lang="en-US" sz="1400" dirty="0">
+                <a:solidFill>
+                  <a:srgbClr val="1F2937"/>
+                </a:solidFill>
+                <a:latin typeface="Consolas"/>
+                <a:cs typeface="Consolas"/>
+              </a:rPr>
+              <a:t>}</a:t>
+            </a:r>
+          </a:p>
+          <a:p>
+            <a:pPr algn="l"/>
+            <a:r>
+              <a:rPr lang="en-US" sz="1400" dirty="0">
+                <a:solidFill>
+                  <a:srgbClr val="1F2937"/>
+                </a:solidFill>
+                <a:latin typeface="Consolas"/>
+                <a:cs typeface="Consolas"/>
+              </a:rPr>
+              <a:t>note 03 {</a:t>
+            </a:r>
+          </a:p>
+          <a:p>
+            <a:pPr algn="l"/>
+            <a:r>
+              <a:rPr lang="en-US" sz="1400" dirty="0">
+                <a:solidFill>
+                  <a:srgbClr val="1F2937"/>
+                </a:solidFill>
+                <a:latin typeface="Consolas"/>
+                <a:cs typeface="Consolas"/>
+              </a:rPr>
+              <a:t>  stock reserved elsewhere</a:t>
+            </a:r>
+          </a:p>
+          <a:p>
+            <a:pPr algn="l"/>
+            <a:r>
+              <a:rPr lang="en-US" sz="1400" dirty="0">
+                <a:solidFill>
+                  <a:srgbClr val="1F2937"/>
+                </a:solidFill>
+                <a:latin typeface="Consolas"/>
+                <a:cs typeface="Consolas"/>
+              </a:rPr>
+              <a:t>}</a:t>
+            </a:r>
+          </a:p>
+          <a:p>
+            <a:pPr algn="l"/>
+            <a:r>
+              <a:rPr lang="en-US" sz="1400" dirty="0">
+                <a:solidFill>
+                  <a:srgbClr val="1F2937"/>
+                </a:solidFill>
+                <a:latin typeface="Consolas"/>
+                <a:cs typeface="Consolas"/>
+              </a:rPr>
+              <a:t>gwt 03 given evt ItemAdded when cmd AddItem then evt ItemAdded</a:t>
             </a:r>
           </a:p>
         </p:txBody>
